--- a/soulia/graphs/cv_vs_fibrose_baseline.pptx
+++ b/soulia/graphs/cv_vs_fibrose_baseline.pptx
@@ -15231,7 +15231,7 @@
           <p:spPr>
             <a:xfrm>
               <a:off x="7709012" y="3690482"/>
-              <a:ext cx="219455" cy="219455"/>
+              <a:ext cx="219455" cy="219456"/>
             </a:xfrm>
             <a:prstGeom prst="rect">
               <a:avLst/>
@@ -15593,7 +15593,7 @@
           <p:spPr>
             <a:xfrm>
               <a:off x="7709012" y="4129394"/>
-              <a:ext cx="219455" cy="219456"/>
+              <a:ext cx="219455" cy="219455"/>
             </a:xfrm>
             <a:prstGeom prst="rect">
               <a:avLst/>
@@ -15774,7 +15774,7 @@
           <p:spPr>
             <a:xfrm>
               <a:off x="7709012" y="4348850"/>
-              <a:ext cx="219455" cy="219455"/>
+              <a:ext cx="219455" cy="219456"/>
             </a:xfrm>
             <a:prstGeom prst="rect">
               <a:avLst/>

--- a/soulia/graphs/cv_vs_fibrose_baseline.pptx
+++ b/soulia/graphs/cv_vs_fibrose_baseline.pptx
@@ -15231,7 +15231,7 @@
           <p:spPr>
             <a:xfrm>
               <a:off x="7709012" y="3690482"/>
-              <a:ext cx="219455" cy="219456"/>
+              <a:ext cx="219455" cy="219455"/>
             </a:xfrm>
             <a:prstGeom prst="rect">
               <a:avLst/>
@@ -15593,7 +15593,7 @@
           <p:spPr>
             <a:xfrm>
               <a:off x="7709012" y="4129394"/>
-              <a:ext cx="219455" cy="219455"/>
+              <a:ext cx="219455" cy="219456"/>
             </a:xfrm>
             <a:prstGeom prst="rect">
               <a:avLst/>
@@ -15774,7 +15774,7 @@
           <p:spPr>
             <a:xfrm>
               <a:off x="7709012" y="4348850"/>
-              <a:ext cx="219455" cy="219456"/>
+              <a:ext cx="219455" cy="219455"/>
             </a:xfrm>
             <a:prstGeom prst="rect">
               <a:avLst/>
